--- a/аналитика/лекции/4 работа с большими данными.pptx
+++ b/аналитика/лекции/4 работа с большими данными.pptx
@@ -300,7 +300,7 @@
             <a:fld id="{62159F2B-F898-408A-9C69-3637C046327F}" type="datetimeFigureOut">
               <a:rPr lang="ru-RU" smtClean="0"/>
               <a:pPr/>
-              <a:t>09.03.2026</a:t>
+              <a:t>10.03.2026</a:t>
             </a:fld>
             <a:endParaRPr lang="ru-RU"/>
           </a:p>
@@ -467,7 +467,7 @@
             <a:fld id="{62159F2B-F898-408A-9C69-3637C046327F}" type="datetimeFigureOut">
               <a:rPr lang="ru-RU" smtClean="0"/>
               <a:pPr/>
-              <a:t>09.03.2026</a:t>
+              <a:t>10.03.2026</a:t>
             </a:fld>
             <a:endParaRPr lang="ru-RU"/>
           </a:p>
@@ -644,7 +644,7 @@
             <a:fld id="{62159F2B-F898-408A-9C69-3637C046327F}" type="datetimeFigureOut">
               <a:rPr lang="ru-RU" smtClean="0"/>
               <a:pPr/>
-              <a:t>09.03.2026</a:t>
+              <a:t>10.03.2026</a:t>
             </a:fld>
             <a:endParaRPr lang="ru-RU"/>
           </a:p>
@@ -811,7 +811,7 @@
             <a:fld id="{62159F2B-F898-408A-9C69-3637C046327F}" type="datetimeFigureOut">
               <a:rPr lang="ru-RU" smtClean="0"/>
               <a:pPr/>
-              <a:t>09.03.2026</a:t>
+              <a:t>10.03.2026</a:t>
             </a:fld>
             <a:endParaRPr lang="ru-RU"/>
           </a:p>
@@ -1054,7 +1054,7 @@
             <a:fld id="{62159F2B-F898-408A-9C69-3637C046327F}" type="datetimeFigureOut">
               <a:rPr lang="ru-RU" smtClean="0"/>
               <a:pPr/>
-              <a:t>09.03.2026</a:t>
+              <a:t>10.03.2026</a:t>
             </a:fld>
             <a:endParaRPr lang="ru-RU"/>
           </a:p>
@@ -1339,7 +1339,7 @@
             <a:fld id="{62159F2B-F898-408A-9C69-3637C046327F}" type="datetimeFigureOut">
               <a:rPr lang="ru-RU" smtClean="0"/>
               <a:pPr/>
-              <a:t>09.03.2026</a:t>
+              <a:t>10.03.2026</a:t>
             </a:fld>
             <a:endParaRPr lang="ru-RU"/>
           </a:p>
@@ -1758,7 +1758,7 @@
             <a:fld id="{62159F2B-F898-408A-9C69-3637C046327F}" type="datetimeFigureOut">
               <a:rPr lang="ru-RU" smtClean="0"/>
               <a:pPr/>
-              <a:t>09.03.2026</a:t>
+              <a:t>10.03.2026</a:t>
             </a:fld>
             <a:endParaRPr lang="ru-RU"/>
           </a:p>
@@ -1873,7 +1873,7 @@
             <a:fld id="{62159F2B-F898-408A-9C69-3637C046327F}" type="datetimeFigureOut">
               <a:rPr lang="ru-RU" smtClean="0"/>
               <a:pPr/>
-              <a:t>09.03.2026</a:t>
+              <a:t>10.03.2026</a:t>
             </a:fld>
             <a:endParaRPr lang="ru-RU"/>
           </a:p>
@@ -1965,7 +1965,7 @@
             <a:fld id="{62159F2B-F898-408A-9C69-3637C046327F}" type="datetimeFigureOut">
               <a:rPr lang="ru-RU" smtClean="0"/>
               <a:pPr/>
-              <a:t>09.03.2026</a:t>
+              <a:t>10.03.2026</a:t>
             </a:fld>
             <a:endParaRPr lang="ru-RU"/>
           </a:p>
@@ -2239,7 +2239,7 @@
             <a:fld id="{62159F2B-F898-408A-9C69-3637C046327F}" type="datetimeFigureOut">
               <a:rPr lang="ru-RU" smtClean="0"/>
               <a:pPr/>
-              <a:t>09.03.2026</a:t>
+              <a:t>10.03.2026</a:t>
             </a:fld>
             <a:endParaRPr lang="ru-RU"/>
           </a:p>
@@ -2489,7 +2489,7 @@
             <a:fld id="{62159F2B-F898-408A-9C69-3637C046327F}" type="datetimeFigureOut">
               <a:rPr lang="ru-RU" smtClean="0"/>
               <a:pPr/>
-              <a:t>09.03.2026</a:t>
+              <a:t>10.03.2026</a:t>
             </a:fld>
             <a:endParaRPr lang="ru-RU"/>
           </a:p>
@@ -2699,7 +2699,7 @@
             <a:fld id="{62159F2B-F898-408A-9C69-3637C046327F}" type="datetimeFigureOut">
               <a:rPr lang="ru-RU" smtClean="0"/>
               <a:pPr/>
-              <a:t>09.03.2026</a:t>
+              <a:t>10.03.2026</a:t>
             </a:fld>
             <a:endParaRPr lang="ru-RU"/>
           </a:p>
@@ -3572,28 +3572,7 @@
                 <a:latin typeface="Times New Roman" pitchFamily="18" charset="0"/>
                 <a:cs typeface="Times New Roman" pitchFamily="18" charset="0"/>
               </a:rPr>
-              <a:t>Скачайте по ссылке </a:t>
-            </a:r>
-            <a:r>
-              <a:rPr lang="ru-RU" sz="2400" dirty="0" smtClean="0">
-                <a:latin typeface="Times New Roman" pitchFamily="18" charset="0"/>
-                <a:cs typeface="Times New Roman" pitchFamily="18" charset="0"/>
-              </a:rPr>
-              <a:t>задание </a:t>
-            </a:r>
-            <a:r>
-              <a:rPr lang="ru-RU" sz="2400" dirty="0" smtClean="0">
-                <a:latin typeface="Times New Roman" pitchFamily="18" charset="0"/>
-                <a:cs typeface="Times New Roman" pitchFamily="18" charset="0"/>
-              </a:rPr>
-              <a:t>по корреляционному анализу данных и группировке </a:t>
-            </a:r>
-            <a:r>
-              <a:rPr lang="ru-RU" sz="2400" dirty="0" smtClean="0">
-                <a:latin typeface="Times New Roman" pitchFamily="18" charset="0"/>
-                <a:cs typeface="Times New Roman" pitchFamily="18" charset="0"/>
-              </a:rPr>
-              <a:t>данных</a:t>
+              <a:t>Скачайте по ссылке задание по корреляционному анализу данных и группировке данных</a:t>
             </a:r>
             <a:endParaRPr lang="en-US" sz="2400" dirty="0" smtClean="0">
               <a:latin typeface="Times New Roman" pitchFamily="18" charset="0"/>
@@ -3608,15 +3587,7 @@
                 <a:cs typeface="Times New Roman" pitchFamily="18" charset="0"/>
                 <a:hlinkClick r:id="rId2"/>
               </a:rPr>
-              <a:t>https://</a:t>
-            </a:r>
-            <a:r>
-              <a:rPr lang="en-US" sz="2400" b="1" dirty="0" smtClean="0">
-                <a:latin typeface="Times New Roman" pitchFamily="18" charset="0"/>
-                <a:cs typeface="Times New Roman" pitchFamily="18" charset="0"/>
-                <a:hlinkClick r:id="rId2"/>
-              </a:rPr>
-              <a:t>disk.360.yandex.ru/d/glRCa8-X2TAA0Q</a:t>
+              <a:t>https://disk.360.yandex.ru/d/glRCa8-X2TAA0Q</a:t>
             </a:r>
             <a:endParaRPr lang="ru-RU" sz="2400" b="1" dirty="0" smtClean="0">
               <a:latin typeface="Times New Roman" pitchFamily="18" charset="0"/>
@@ -6414,6 +6385,36 @@
               <a:t>Хотите быстро написать </a:t>
             </a:r>
             <a:r>
+              <a:rPr kumimoji="0" lang="ru-RU" sz="1200" b="0" i="0" u="none" strike="noStrike" cap="none" normalizeH="0" baseline="0" dirty="0" smtClean="0">
+                <a:ln>
+                  <a:noFill/>
+                </a:ln>
+                <a:solidFill>
+                  <a:schemeClr val="tx1"/>
+                </a:solidFill>
+                <a:effectLst/>
+                <a:latin typeface="Times New Roman" pitchFamily="18" charset="0"/>
+                <a:ea typeface="Times New Roman" pitchFamily="18" charset="0"/>
+                <a:cs typeface="Times New Roman" pitchFamily="18" charset="0"/>
+              </a:rPr>
+              <a:t>S</a:t>
+            </a:r>
+            <a:r>
+              <a:rPr kumimoji="0" lang="en-US" sz="1200" b="0" i="0" u="none" strike="noStrike" cap="none" normalizeH="0" baseline="0" dirty="0" smtClean="0">
+                <a:ln>
+                  <a:noFill/>
+                </a:ln>
+                <a:solidFill>
+                  <a:schemeClr val="tx1"/>
+                </a:solidFill>
+                <a:effectLst/>
+                <a:latin typeface="Times New Roman" pitchFamily="18" charset="0"/>
+                <a:ea typeface="Times New Roman" pitchFamily="18" charset="0"/>
+                <a:cs typeface="Times New Roman" pitchFamily="18" charset="0"/>
+              </a:rPr>
+              <a:t>Q</a:t>
+            </a:r>
+            <a:r>
               <a:rPr kumimoji="0" lang="ru-RU" sz="1200" b="0" i="0" u="none" strike="noStrike" cap="none" normalizeH="0" baseline="0" dirty="0" err="1" smtClean="0">
                 <a:ln>
                   <a:noFill/>
@@ -6426,7 +6427,7 @@
                 <a:ea typeface="Times New Roman" pitchFamily="18" charset="0"/>
                 <a:cs typeface="Times New Roman" pitchFamily="18" charset="0"/>
               </a:rPr>
-              <a:t>SQL</a:t>
+              <a:t>L</a:t>
             </a:r>
             <a:r>
               <a:rPr kumimoji="0" lang="ru-RU" sz="1200" b="0" i="0" u="none" strike="noStrike" cap="none" normalizeH="0" baseline="0" dirty="0" err="1" smtClean="0">
@@ -6471,7 +6472,22 @@
                 <a:ea typeface="Times New Roman" pitchFamily="18" charset="0"/>
                 <a:cs typeface="Times New Roman" pitchFamily="18" charset="0"/>
               </a:rPr>
-              <a:t> без создания базы.</a:t>
+              <a:t> </a:t>
+            </a:r>
+            <a:r>
+              <a:rPr kumimoji="0" lang="ru-RU" sz="1200" b="0" i="0" u="none" strike="noStrike" cap="none" normalizeH="0" baseline="0" dirty="0" smtClean="0">
+                <a:ln>
+                  <a:noFill/>
+                </a:ln>
+                <a:solidFill>
+                  <a:schemeClr val="tx1"/>
+                </a:solidFill>
+                <a:effectLst/>
+                <a:latin typeface="Times New Roman" pitchFamily="18" charset="0"/>
+                <a:ea typeface="Times New Roman" pitchFamily="18" charset="0"/>
+                <a:cs typeface="Times New Roman" pitchFamily="18" charset="0"/>
+              </a:rPr>
+              <a:t>без создания базы.</a:t>
             </a:r>
             <a:endParaRPr kumimoji="0" lang="ru-RU" sz="1800" b="0" i="0" u="none" strike="noStrike" cap="none" normalizeH="0" baseline="0" dirty="0" smtClean="0">
               <a:ln>

--- a/аналитика/лекции/4 работа с большими данными.pptx
+++ b/аналитика/лекции/4 работа с большими данными.pptx
@@ -300,7 +300,7 @@
             <a:fld id="{62159F2B-F898-408A-9C69-3637C046327F}" type="datetimeFigureOut">
               <a:rPr lang="ru-RU" smtClean="0"/>
               <a:pPr/>
-              <a:t>10.03.2026</a:t>
+              <a:t>16.03.2026</a:t>
             </a:fld>
             <a:endParaRPr lang="ru-RU"/>
           </a:p>
@@ -467,7 +467,7 @@
             <a:fld id="{62159F2B-F898-408A-9C69-3637C046327F}" type="datetimeFigureOut">
               <a:rPr lang="ru-RU" smtClean="0"/>
               <a:pPr/>
-              <a:t>10.03.2026</a:t>
+              <a:t>16.03.2026</a:t>
             </a:fld>
             <a:endParaRPr lang="ru-RU"/>
           </a:p>
@@ -644,7 +644,7 @@
             <a:fld id="{62159F2B-F898-408A-9C69-3637C046327F}" type="datetimeFigureOut">
               <a:rPr lang="ru-RU" smtClean="0"/>
               <a:pPr/>
-              <a:t>10.03.2026</a:t>
+              <a:t>16.03.2026</a:t>
             </a:fld>
             <a:endParaRPr lang="ru-RU"/>
           </a:p>
@@ -811,7 +811,7 @@
             <a:fld id="{62159F2B-F898-408A-9C69-3637C046327F}" type="datetimeFigureOut">
               <a:rPr lang="ru-RU" smtClean="0"/>
               <a:pPr/>
-              <a:t>10.03.2026</a:t>
+              <a:t>16.03.2026</a:t>
             </a:fld>
             <a:endParaRPr lang="ru-RU"/>
           </a:p>
@@ -1054,7 +1054,7 @@
             <a:fld id="{62159F2B-F898-408A-9C69-3637C046327F}" type="datetimeFigureOut">
               <a:rPr lang="ru-RU" smtClean="0"/>
               <a:pPr/>
-              <a:t>10.03.2026</a:t>
+              <a:t>16.03.2026</a:t>
             </a:fld>
             <a:endParaRPr lang="ru-RU"/>
           </a:p>
@@ -1339,7 +1339,7 @@
             <a:fld id="{62159F2B-F898-408A-9C69-3637C046327F}" type="datetimeFigureOut">
               <a:rPr lang="ru-RU" smtClean="0"/>
               <a:pPr/>
-              <a:t>10.03.2026</a:t>
+              <a:t>16.03.2026</a:t>
             </a:fld>
             <a:endParaRPr lang="ru-RU"/>
           </a:p>
@@ -1758,7 +1758,7 @@
             <a:fld id="{62159F2B-F898-408A-9C69-3637C046327F}" type="datetimeFigureOut">
               <a:rPr lang="ru-RU" smtClean="0"/>
               <a:pPr/>
-              <a:t>10.03.2026</a:t>
+              <a:t>16.03.2026</a:t>
             </a:fld>
             <a:endParaRPr lang="ru-RU"/>
           </a:p>
@@ -1873,7 +1873,7 @@
             <a:fld id="{62159F2B-F898-408A-9C69-3637C046327F}" type="datetimeFigureOut">
               <a:rPr lang="ru-RU" smtClean="0"/>
               <a:pPr/>
-              <a:t>10.03.2026</a:t>
+              <a:t>16.03.2026</a:t>
             </a:fld>
             <a:endParaRPr lang="ru-RU"/>
           </a:p>
@@ -1965,7 +1965,7 @@
             <a:fld id="{62159F2B-F898-408A-9C69-3637C046327F}" type="datetimeFigureOut">
               <a:rPr lang="ru-RU" smtClean="0"/>
               <a:pPr/>
-              <a:t>10.03.2026</a:t>
+              <a:t>16.03.2026</a:t>
             </a:fld>
             <a:endParaRPr lang="ru-RU"/>
           </a:p>
@@ -2239,7 +2239,7 @@
             <a:fld id="{62159F2B-F898-408A-9C69-3637C046327F}" type="datetimeFigureOut">
               <a:rPr lang="ru-RU" smtClean="0"/>
               <a:pPr/>
-              <a:t>10.03.2026</a:t>
+              <a:t>16.03.2026</a:t>
             </a:fld>
             <a:endParaRPr lang="ru-RU"/>
           </a:p>
@@ -2489,7 +2489,7 @@
             <a:fld id="{62159F2B-F898-408A-9C69-3637C046327F}" type="datetimeFigureOut">
               <a:rPr lang="ru-RU" smtClean="0"/>
               <a:pPr/>
-              <a:t>10.03.2026</a:t>
+              <a:t>16.03.2026</a:t>
             </a:fld>
             <a:endParaRPr lang="ru-RU"/>
           </a:p>
@@ -2699,7 +2699,7 @@
             <a:fld id="{62159F2B-F898-408A-9C69-3637C046327F}" type="datetimeFigureOut">
               <a:rPr lang="ru-RU" smtClean="0"/>
               <a:pPr/>
-              <a:t>10.03.2026</a:t>
+              <a:t>16.03.2026</a:t>
             </a:fld>
             <a:endParaRPr lang="ru-RU"/>
           </a:p>
@@ -3703,7 +3703,7 @@
                 <a:latin typeface="Times New Roman" pitchFamily="18" charset="0"/>
                 <a:cs typeface="Times New Roman" pitchFamily="18" charset="0"/>
               </a:rPr>
-              <a:t>Ваша задача, понять, для чего может использоваться корреляция и для чего нужны подобные сводные таблицы.</a:t>
+              <a:t>Ваша задача, ознакомиться, для чего может использоваться корреляция и для чего нужны сводные таблицы.</a:t>
             </a:r>
             <a:endParaRPr lang="ru-RU" sz="2400" dirty="0">
               <a:latin typeface="Times New Roman" pitchFamily="18" charset="0"/>
@@ -5598,6 +5598,39 @@
           <a:effectLst/>
         </p:spPr>
       </p:pic>
+      <p:pic>
+        <p:nvPicPr>
+          <p:cNvPr id="1026" name="Picture 2"/>
+          <p:cNvPicPr>
+            <a:picLocks noChangeAspect="1" noChangeArrowheads="1"/>
+          </p:cNvPicPr>
+          <p:nvPr/>
+        </p:nvPicPr>
+        <p:blipFill>
+          <a:blip r:embed="rId3"/>
+          <a:srcRect/>
+          <a:stretch>
+            <a:fillRect/>
+          </a:stretch>
+        </p:blipFill>
+        <p:spPr bwMode="auto">
+          <a:xfrm>
+            <a:off x="6724650" y="6362700"/>
+            <a:ext cx="2419350" cy="495300"/>
+          </a:xfrm>
+          <a:prstGeom prst="rect">
+            <a:avLst/>
+          </a:prstGeom>
+          <a:noFill/>
+          <a:ln w="9525">
+            <a:noFill/>
+            <a:miter lim="800000"/>
+            <a:headEnd/>
+            <a:tailEnd/>
+          </a:ln>
+          <a:effectLst/>
+        </p:spPr>
+      </p:pic>
     </p:spTree>
   </p:cSld>
   <p:clrMapOvr>
@@ -6382,22 +6415,7 @@
                 <a:ea typeface="Times New Roman" pitchFamily="18" charset="0"/>
                 <a:cs typeface="Times New Roman" pitchFamily="18" charset="0"/>
               </a:rPr>
-              <a:t>Хотите быстро написать </a:t>
-            </a:r>
-            <a:r>
-              <a:rPr kumimoji="0" lang="ru-RU" sz="1200" b="0" i="0" u="none" strike="noStrike" cap="none" normalizeH="0" baseline="0" dirty="0" smtClean="0">
-                <a:ln>
-                  <a:noFill/>
-                </a:ln>
-                <a:solidFill>
-                  <a:schemeClr val="tx1"/>
-                </a:solidFill>
-                <a:effectLst/>
-                <a:latin typeface="Times New Roman" pitchFamily="18" charset="0"/>
-                <a:ea typeface="Times New Roman" pitchFamily="18" charset="0"/>
-                <a:cs typeface="Times New Roman" pitchFamily="18" charset="0"/>
-              </a:rPr>
-              <a:t>S</a:t>
+              <a:t>Хотите быстро написать S</a:t>
             </a:r>
             <a:r>
               <a:rPr kumimoji="0" lang="en-US" sz="1200" b="0" i="0" u="none" strike="noStrike" cap="none" normalizeH="0" baseline="0" dirty="0" smtClean="0">
@@ -6472,22 +6490,7 @@
                 <a:ea typeface="Times New Roman" pitchFamily="18" charset="0"/>
                 <a:cs typeface="Times New Roman" pitchFamily="18" charset="0"/>
               </a:rPr>
-              <a:t> </a:t>
-            </a:r>
-            <a:r>
-              <a:rPr kumimoji="0" lang="ru-RU" sz="1200" b="0" i="0" u="none" strike="noStrike" cap="none" normalizeH="0" baseline="0" dirty="0" smtClean="0">
-                <a:ln>
-                  <a:noFill/>
-                </a:ln>
-                <a:solidFill>
-                  <a:schemeClr val="tx1"/>
-                </a:solidFill>
-                <a:effectLst/>
-                <a:latin typeface="Times New Roman" pitchFamily="18" charset="0"/>
-                <a:ea typeface="Times New Roman" pitchFamily="18" charset="0"/>
-                <a:cs typeface="Times New Roman" pitchFamily="18" charset="0"/>
-              </a:rPr>
-              <a:t>без создания базы.</a:t>
+              <a:t> без создания базы.</a:t>
             </a:r>
             <a:endParaRPr kumimoji="0" lang="ru-RU" sz="1800" b="0" i="0" u="none" strike="noStrike" cap="none" normalizeH="0" baseline="0" dirty="0" smtClean="0">
               <a:ln>
